--- a/CDSD_Concepteur_Developpeur_Sciences_Donnees/Presentations_certification/ppt_versions/Bloc5_CDSD_Loic_Valentini.pptx
+++ b/CDSD_Concepteur_Developpeur_Sciences_Donnees/Presentations_certification/ppt_versions/Bloc5_CDSD_Loic_Valentini.pptx
@@ -7414,29 +7414,8 @@
                 <a:cs typeface="Inter SemiBold"/>
                 <a:sym typeface="Inter SemiBold"/>
               </a:rPr>
-              <a:t>Optimiser la location entre </a:t>
+              <a:t>Optimiser la location entre particuliers</a:t>
             </a:r>
-            <a:r>
-              <a:rPr lang="fr-FR" sz="2500" dirty="0" err="1">
-                <a:solidFill>
-                  <a:srgbClr val="0E3449"/>
-                </a:solidFill>
-                <a:latin typeface="Inter SemiBold"/>
-                <a:ea typeface="Inter SemiBold"/>
-                <a:cs typeface="Inter SemiBold"/>
-                <a:sym typeface="Inter SemiBold"/>
-              </a:rPr>
-              <a:t>partioculiers</a:t>
-            </a:r>
-            <a:endParaRPr lang="fr-FR" sz="2500" dirty="0">
-              <a:solidFill>
-                <a:srgbClr val="0E3449"/>
-              </a:solidFill>
-              <a:latin typeface="Inter SemiBold"/>
-              <a:ea typeface="Inter SemiBold"/>
-              <a:cs typeface="Inter SemiBold"/>
-              <a:sym typeface="Inter SemiBold"/>
-            </a:endParaRPr>
           </a:p>
         </p:txBody>
       </p:sp>
@@ -11531,18 +11510,11 @@
               <a:t>Intégrer l’API directement dans l’interface </a:t>
             </a:r>
             <a:r>
-              <a:rPr lang="fr-FR" sz="1400" dirty="0" err="1">
+              <a:rPr lang="fr-FR" sz="1400">
                 <a:latin typeface="Inter Medium" panose="020B0604020202020204" charset="0"/>
                 <a:ea typeface="Inter Medium" panose="020B0604020202020204" charset="0"/>
               </a:rPr>
               <a:t>Getaround</a:t>
-            </a:r>
-            <a:r>
-              <a:rPr lang="fr-FR" sz="1400" dirty="0">
-                <a:latin typeface="Inter Medium" panose="020B0604020202020204" charset="0"/>
-                <a:ea typeface="Inter Medium" panose="020B0604020202020204" charset="0"/>
-              </a:rPr>
-              <a:t> pour un tarif dynamique en live)</a:t>
             </a:r>
             <a:br>
               <a:rPr lang="fr-FR" sz="1400" dirty="0">
